--- a/presentation/OSOS-Delivery-long-cut.pptx
+++ b/presentation/OSOS-Delivery-long-cut.pptx
@@ -10954,7 +10954,7 @@
                 </a:solidFill>
                 <a:latin typeface="Consolas"/>
               </a:rPr>
-              <a:t>mqtt: connecting to nba17802...emqxsl.com:8883 ... ok</a:t>
+              <a:t>mqtt: connecting to your-deployment.emqxsl.com:8883 ... ok</a:t>
             </a:r>
           </a:p>
           <a:p>
@@ -29907,7 +29907,7 @@
                 </a:solidFill>
                 <a:latin typeface="Segoe UI"/>
               </a:rPr>
-              <a:t>  Its address is a DHCP reservation on MAC 00-00-36-7F-04-55, because CFG_METER_HOST is a compile-time constant.</a:t>
+              <a:t>  Its address is a DHCP reservation on MAC xx-xx-xx-xx-xx-xx, because CFG_METER_HOST is a compile-time constant.</a:t>
             </a:r>
           </a:p>
         </p:txBody>
@@ -58444,7 +58444,7 @@
                 </a:solidFill>
                 <a:latin typeface="Consolas"/>
               </a:rPr>
-              <a:t>SSID IKOM_Bilisim</a:t>
+              <a:t>SSID your-ssid</a:t>
             </a:r>
           </a:p>
         </p:txBody>
@@ -66546,7 +66546,7 @@
                 </a:solidFill>
                 <a:latin typeface="Consolas"/>
               </a:rPr>
-              <a:t>Ethernet II   MAC 00-00-36-7F-04-55</a:t>
+              <a:t>Ethernet II   MAC xx-xx-xx-xx-xx-xx</a:t>
             </a:r>
           </a:p>
         </p:txBody>
@@ -66588,7 +66588,7 @@
                 </a:solidFill>
                 <a:latin typeface="Consolas"/>
               </a:rPr>
-              <a:t>802.11 b/g/n   CSMA/CA, SSID IKOM_Bilisim</a:t>
+              <a:t>802.11 b/g/n   CSMA/CA, SSID your-ssid</a:t>
             </a:r>
           </a:p>
         </p:txBody>
